--- a/docs/tema1/diapositivas/hibernate-a-fondo.pptx
+++ b/docs/tema1/diapositivas/hibernate-a-fondo.pptx
@@ -5,7 +5,7 @@
     <p:sldMasterId id="2147483648" r:id="rId1"/>
   </p:sldMasterIdLst>
   <p:notesMasterIdLst>
-    <p:notesMasterId r:id="rId38"/>
+    <p:notesMasterId r:id="rId39"/>
   </p:notesMasterIdLst>
   <p:sldIdLst>
     <p:sldId id="256" r:id="rId2"/>
@@ -13,37 +13,38 @@
     <p:sldId id="258" r:id="rId4"/>
     <p:sldId id="259" r:id="rId5"/>
     <p:sldId id="260" r:id="rId6"/>
-    <p:sldId id="261" r:id="rId7"/>
-    <p:sldId id="262" r:id="rId8"/>
-    <p:sldId id="263" r:id="rId9"/>
-    <p:sldId id="264" r:id="rId10"/>
-    <p:sldId id="265" r:id="rId11"/>
-    <p:sldId id="266" r:id="rId12"/>
-    <p:sldId id="267" r:id="rId13"/>
-    <p:sldId id="268" r:id="rId14"/>
-    <p:sldId id="269" r:id="rId15"/>
-    <p:sldId id="270" r:id="rId16"/>
-    <p:sldId id="271" r:id="rId17"/>
-    <p:sldId id="272" r:id="rId18"/>
-    <p:sldId id="273" r:id="rId19"/>
-    <p:sldId id="274" r:id="rId20"/>
-    <p:sldId id="275" r:id="rId21"/>
-    <p:sldId id="276" r:id="rId22"/>
-    <p:sldId id="277" r:id="rId23"/>
-    <p:sldId id="278" r:id="rId24"/>
-    <p:sldId id="279" r:id="rId25"/>
-    <p:sldId id="280" r:id="rId26"/>
-    <p:sldId id="281" r:id="rId27"/>
-    <p:sldId id="282" r:id="rId28"/>
-    <p:sldId id="283" r:id="rId29"/>
-    <p:sldId id="284" r:id="rId30"/>
-    <p:sldId id="285" r:id="rId31"/>
-    <p:sldId id="286" r:id="rId32"/>
-    <p:sldId id="287" r:id="rId33"/>
-    <p:sldId id="288" r:id="rId34"/>
-    <p:sldId id="289" r:id="rId35"/>
-    <p:sldId id="290" r:id="rId36"/>
-    <p:sldId id="291" r:id="rId37"/>
+    <p:sldId id="292" r:id="rId7"/>
+    <p:sldId id="261" r:id="rId8"/>
+    <p:sldId id="262" r:id="rId9"/>
+    <p:sldId id="263" r:id="rId10"/>
+    <p:sldId id="264" r:id="rId11"/>
+    <p:sldId id="265" r:id="rId12"/>
+    <p:sldId id="266" r:id="rId13"/>
+    <p:sldId id="267" r:id="rId14"/>
+    <p:sldId id="268" r:id="rId15"/>
+    <p:sldId id="269" r:id="rId16"/>
+    <p:sldId id="270" r:id="rId17"/>
+    <p:sldId id="271" r:id="rId18"/>
+    <p:sldId id="272" r:id="rId19"/>
+    <p:sldId id="273" r:id="rId20"/>
+    <p:sldId id="274" r:id="rId21"/>
+    <p:sldId id="275" r:id="rId22"/>
+    <p:sldId id="276" r:id="rId23"/>
+    <p:sldId id="277" r:id="rId24"/>
+    <p:sldId id="278" r:id="rId25"/>
+    <p:sldId id="279" r:id="rId26"/>
+    <p:sldId id="280" r:id="rId27"/>
+    <p:sldId id="281" r:id="rId28"/>
+    <p:sldId id="282" r:id="rId29"/>
+    <p:sldId id="283" r:id="rId30"/>
+    <p:sldId id="284" r:id="rId31"/>
+    <p:sldId id="285" r:id="rId32"/>
+    <p:sldId id="286" r:id="rId33"/>
+    <p:sldId id="287" r:id="rId34"/>
+    <p:sldId id="288" r:id="rId35"/>
+    <p:sldId id="289" r:id="rId36"/>
+    <p:sldId id="290" r:id="rId37"/>
+    <p:sldId id="291" r:id="rId38"/>
   </p:sldIdLst>
   <p:sldSz cx="12192000" cy="6858000"/>
   <p:notesSz cx="6858000" cy="12192000"/>
@@ -2792,6 +2793,90 @@
 </p:notes>
 </file>
 
+<file path=ppt/notesSlides/notesSlide37.xml><?xml version="1.0" encoding="utf-8"?>
+<p:notes xmlns:a="http://schemas.openxmlformats.org/drawingml/2006/main" xmlns:r="http://schemas.openxmlformats.org/officeDocument/2006/relationships" xmlns:p="http://schemas.openxmlformats.org/presentationml/2006/main">
+  <p:cSld>
+    <p:spTree>
+      <p:nvGrpSpPr>
+        <p:cNvPr id="1" name=""/>
+        <p:cNvGrpSpPr/>
+        <p:nvPr/>
+      </p:nvGrpSpPr>
+      <p:grpSpPr>
+        <a:xfrm>
+          <a:off x="0" y="0"/>
+          <a:ext cx="0" cy="0"/>
+          <a:chOff x="0" y="0"/>
+          <a:chExt cx="0" cy="0"/>
+        </a:xfrm>
+      </p:grpSpPr>
+      <p:sp>
+        <p:nvSpPr>
+          <p:cNvPr id="2" name="Slide Image Placeholder 1"/>
+          <p:cNvSpPr>
+            <a:spLocks noGrp="1" noRot="1" noChangeAspect="1"/>
+          </p:cNvSpPr>
+          <p:nvPr>
+            <p:ph type="sldImg"/>
+          </p:nvPr>
+        </p:nvSpPr>
+        <p:spPr/>
+      </p:sp>
+      <p:sp>
+        <p:nvSpPr>
+          <p:cNvPr id="3" name="Notes Placeholder 2"/>
+          <p:cNvSpPr>
+            <a:spLocks noGrp="1"/>
+          </p:cNvSpPr>
+          <p:nvPr>
+            <p:ph type="body" idx="1"/>
+          </p:nvPr>
+        </p:nvSpPr>
+        <p:spPr/>
+        <p:txBody>
+          <a:bodyPr/>
+          <a:lstStyle/>
+          <a:p>
+            <a:endParaRPr lang="en-US" dirty="0"/>
+          </a:p>
+        </p:txBody>
+      </p:sp>
+      <p:sp>
+        <p:nvSpPr>
+          <p:cNvPr id="4" name="Slide Number Placeholder 3"/>
+          <p:cNvSpPr>
+            <a:spLocks noGrp="1"/>
+          </p:cNvSpPr>
+          <p:nvPr>
+            <p:ph type="sldNum" sz="quarter" idx="10"/>
+          </p:nvPr>
+        </p:nvSpPr>
+        <p:spPr/>
+        <p:txBody>
+          <a:bodyPr/>
+          <a:lstStyle/>
+          <a:p>
+            <a:fld id="{F7021451-1387-4CA6-816F-3879F97B5CBC}" type="slidenum">
+              <a:rPr lang="en-US"/>
+              <a:t>37</a:t>
+            </a:fld>
+            <a:endParaRPr lang="en-US"/>
+          </a:p>
+        </p:txBody>
+      </p:sp>
+    </p:spTree>
+    <p:extLst>
+      <p:ext uri="{BB962C8B-B14F-4D97-AF65-F5344CB8AC3E}">
+        <p14:creationId xmlns:p14="http://schemas.microsoft.com/office/powerpoint/2010/main" val="1024086991"/>
+      </p:ext>
+    </p:extLst>
+  </p:cSld>
+  <p:clrMapOvr>
+    <a:masterClrMapping/>
+  </p:clrMapOvr>
+</p:notes>
+</file>
+
 <file path=ppt/notesSlides/notesSlide4.xml><?xml version="1.0" encoding="utf-8"?>
 <p:notes xmlns:a="http://schemas.openxmlformats.org/drawingml/2006/main" xmlns:r="http://schemas.openxmlformats.org/officeDocument/2006/relationships" xmlns:p="http://schemas.openxmlformats.org/presentationml/2006/main">
   <p:cSld>
@@ -2965,7 +3050,13 @@
   <p:cSld>
     <p:spTree>
       <p:nvGrpSpPr>
-        <p:cNvPr id="1" name=""/>
+        <p:cNvPr id="1" name="">
+          <a:extLst>
+            <a:ext uri="{FF2B5EF4-FFF2-40B4-BE49-F238E27FC236}">
+              <a16:creationId xmlns:a16="http://schemas.microsoft.com/office/drawing/2014/main" id="{98526C2B-61D1-B772-89CC-81A1D7088E15}"/>
+            </a:ext>
+          </a:extLst>
+        </p:cNvPr>
         <p:cNvGrpSpPr/>
         <p:nvPr/>
       </p:nvGrpSpPr>
@@ -2979,7 +3070,13 @@
       </p:grpSpPr>
       <p:sp>
         <p:nvSpPr>
-          <p:cNvPr id="2" name="Slide Image Placeholder 1"/>
+          <p:cNvPr id="2" name="Slide Image Placeholder 1">
+            <a:extLst>
+              <a:ext uri="{FF2B5EF4-FFF2-40B4-BE49-F238E27FC236}">
+                <a16:creationId xmlns:a16="http://schemas.microsoft.com/office/drawing/2014/main" id="{8AF352FC-623F-7E58-054E-5E6DE3E4E58B}"/>
+              </a:ext>
+            </a:extLst>
+          </p:cNvPr>
           <p:cNvSpPr>
             <a:spLocks noGrp="1" noRot="1" noChangeAspect="1"/>
           </p:cNvSpPr>
@@ -2991,7 +3088,13 @@
       </p:sp>
       <p:sp>
         <p:nvSpPr>
-          <p:cNvPr id="3" name="Notes Placeholder 2"/>
+          <p:cNvPr id="3" name="Notes Placeholder 2">
+            <a:extLst>
+              <a:ext uri="{FF2B5EF4-FFF2-40B4-BE49-F238E27FC236}">
+                <a16:creationId xmlns:a16="http://schemas.microsoft.com/office/drawing/2014/main" id="{26819D17-03FE-1F4D-8A6A-E517A6725F4C}"/>
+              </a:ext>
+            </a:extLst>
+          </p:cNvPr>
           <p:cNvSpPr>
             <a:spLocks noGrp="1"/>
           </p:cNvSpPr>
@@ -3010,7 +3113,13 @@
       </p:sp>
       <p:sp>
         <p:nvSpPr>
-          <p:cNvPr id="4" name="Slide Number Placeholder 3"/>
+          <p:cNvPr id="4" name="Slide Number Placeholder 3">
+            <a:extLst>
+              <a:ext uri="{FF2B5EF4-FFF2-40B4-BE49-F238E27FC236}">
+                <a16:creationId xmlns:a16="http://schemas.microsoft.com/office/drawing/2014/main" id="{77F3DD55-40F4-1BD4-001B-CC75A9CF2B9F}"/>
+              </a:ext>
+            </a:extLst>
+          </p:cNvPr>
           <p:cNvSpPr>
             <a:spLocks noGrp="1"/>
           </p:cNvSpPr>
@@ -3034,7 +3143,7 @@
     </p:spTree>
     <p:extLst>
       <p:ext uri="{BB962C8B-B14F-4D97-AF65-F5344CB8AC3E}">
-        <p14:creationId xmlns:p14="http://schemas.microsoft.com/office/powerpoint/2010/main" val="1024086991"/>
+        <p14:creationId xmlns:p14="http://schemas.microsoft.com/office/powerpoint/2010/main" val="2674672187"/>
       </p:ext>
     </p:extLst>
   </p:cSld>
@@ -3826,6 +3935,212 @@
 
 <file path=ppt/slides/slide10.xml><?xml version="1.0" encoding="utf-8"?>
 <p:sld xmlns:a="http://schemas.openxmlformats.org/drawingml/2006/main" xmlns:r="http://schemas.openxmlformats.org/officeDocument/2006/relationships" xmlns:p="http://schemas.openxmlformats.org/presentationml/2006/main">
+  <p:cSld name="Slide 9">
+    <p:spTree>
+      <p:nvGrpSpPr>
+        <p:cNvPr id="1" name=""/>
+        <p:cNvGrpSpPr/>
+        <p:nvPr/>
+      </p:nvGrpSpPr>
+      <p:grpSpPr>
+        <a:xfrm>
+          <a:off x="0" y="0"/>
+          <a:ext cx="0" cy="0"/>
+          <a:chOff x="0" y="0"/>
+          <a:chExt cx="0" cy="0"/>
+        </a:xfrm>
+      </p:grpSpPr>
+      <p:sp>
+        <p:nvSpPr>
+          <p:cNvPr id="2" name="Shape 0"/>
+          <p:cNvSpPr/>
+          <p:nvPr/>
+        </p:nvSpPr>
+        <p:spPr>
+          <a:xfrm>
+            <a:off x="0" y="0"/>
+            <a:ext cx="12188952" cy="777240"/>
+          </a:xfrm>
+          <a:prstGeom prst="rect">
+            <a:avLst/>
+          </a:prstGeom>
+          <a:solidFill>
+            <a:srgbClr val="7F0000"/>
+          </a:solidFill>
+          <a:ln w="12700">
+            <a:solidFill>
+              <a:srgbClr val="7F0000"/>
+            </a:solidFill>
+            <a:prstDash val="solid"/>
+          </a:ln>
+        </p:spPr>
+        <p:txBody>
+          <a:bodyPr/>
+          <a:lstStyle/>
+          <a:p>
+            <a:endParaRPr lang="es-ES"/>
+          </a:p>
+        </p:txBody>
+      </p:sp>
+      <p:sp>
+        <p:nvSpPr>
+          <p:cNvPr id="3" name="Text 1"/>
+          <p:cNvSpPr/>
+          <p:nvPr/>
+        </p:nvSpPr>
+        <p:spPr>
+          <a:xfrm>
+            <a:off x="365760" y="0"/>
+            <a:ext cx="11457432" cy="777240"/>
+          </a:xfrm>
+          <a:prstGeom prst="rect">
+            <a:avLst/>
+          </a:prstGeom>
+          <a:noFill/>
+          <a:ln/>
+        </p:spPr>
+        <p:txBody>
+          <a:bodyPr wrap="square" rtlCol="0" anchor="ctr"/>
+          <a:lstStyle/>
+          <a:p>
+            <a:pPr marL="0" indent="0">
+              <a:buNone/>
+            </a:pPr>
+            <a:r>
+              <a:rPr lang="en-US" sz="2500" b="1" dirty="0">
+                <a:solidFill>
+                  <a:srgbClr val="FFFFFF"/>
+                </a:solidFill>
+                <a:latin typeface="Arial" pitchFamily="34" charset="0"/>
+                <a:ea typeface="Arial" pitchFamily="34" charset="-122"/>
+                <a:cs typeface="Arial" pitchFamily="34" charset="-120"/>
+              </a:rPr>
+              <a:t>Cuando la transacción termina</a:t>
+            </a:r>
+            <a:endParaRPr lang="en-US" sz="2500" dirty="0"/>
+          </a:p>
+        </p:txBody>
+      </p:sp>
+      <p:sp>
+        <p:nvSpPr>
+          <p:cNvPr id="4" name="Text 2"/>
+          <p:cNvSpPr/>
+          <p:nvPr/>
+        </p:nvSpPr>
+        <p:spPr>
+          <a:xfrm>
+            <a:off x="548640" y="6473952"/>
+            <a:ext cx="11091672" cy="292608"/>
+          </a:xfrm>
+          <a:prstGeom prst="rect">
+            <a:avLst/>
+          </a:prstGeom>
+          <a:noFill/>
+          <a:ln/>
+        </p:spPr>
+        <p:txBody>
+          <a:bodyPr wrap="square" rtlCol="0" anchor="ctr"/>
+          <a:lstStyle/>
+          <a:p>
+            <a:pPr marL="0" indent="0" algn="r">
+              <a:buNone/>
+            </a:pPr>
+            <a:r>
+              <a:rPr lang="en-US" sz="1100" dirty="0">
+                <a:solidFill>
+                  <a:srgbClr val="757575"/>
+                </a:solidFill>
+                <a:latin typeface="Arial" pitchFamily="34" charset="0"/>
+                <a:ea typeface="Arial" pitchFamily="34" charset="-122"/>
+                <a:cs typeface="Arial" pitchFamily="34" charset="-120"/>
+              </a:rPr>
+              <a:t>Acceso a Datos — Tema 1: Hibernate a fondo</a:t>
+            </a:r>
+            <a:endParaRPr lang="en-US" sz="1100" dirty="0"/>
+          </a:p>
+        </p:txBody>
+      </p:sp>
+      <p:sp>
+        <p:nvSpPr>
+          <p:cNvPr id="5" name="Shape 3"/>
+          <p:cNvSpPr/>
+          <p:nvPr/>
+        </p:nvSpPr>
+        <p:spPr>
+          <a:xfrm>
+            <a:off x="548640" y="2880360"/>
+            <a:ext cx="11091672" cy="1463040"/>
+          </a:xfrm>
+          <a:prstGeom prst="roundRect">
+            <a:avLst/>
+          </a:prstGeom>
+          <a:solidFill>
+            <a:srgbClr val="FBE9E7"/>
+          </a:solidFill>
+          <a:ln w="19050">
+            <a:solidFill>
+              <a:srgbClr val="E64A19"/>
+            </a:solidFill>
+            <a:prstDash val="solid"/>
+          </a:ln>
+        </p:spPr>
+        <p:txBody>
+          <a:bodyPr/>
+          <a:lstStyle/>
+          <a:p>
+            <a:endParaRPr lang="es-ES"/>
+          </a:p>
+        </p:txBody>
+      </p:sp>
+      <p:sp>
+        <p:nvSpPr>
+          <p:cNvPr id="6" name="Text 4"/>
+          <p:cNvSpPr/>
+          <p:nvPr/>
+        </p:nvSpPr>
+        <p:spPr>
+          <a:xfrm>
+            <a:off x="822960" y="2971800"/>
+            <a:ext cx="10543032" cy="1280160"/>
+          </a:xfrm>
+          <a:prstGeom prst="rect">
+            <a:avLst/>
+          </a:prstGeom>
+          <a:noFill/>
+          <a:ln/>
+        </p:spPr>
+        <p:txBody>
+          <a:bodyPr wrap="square" rtlCol="0" anchor="ctr"/>
+          <a:lstStyle/>
+          <a:p>
+            <a:pPr marL="0" indent="0">
+              <a:buNone/>
+            </a:pPr>
+            <a:r>
+              <a:rPr lang="en-US" sz="2100" dirty="0">
+                <a:solidFill>
+                  <a:srgbClr val="212121"/>
+                </a:solidFill>
+                <a:latin typeface="Arial" pitchFamily="34" charset="0"/>
+                <a:ea typeface="Arial" pitchFamily="34" charset="-122"/>
+                <a:cs typeface="Arial" pitchFamily="34" charset="-120"/>
+              </a:rPr>
+              <a:t>Cuando la transacción finaliza y Hibernate deja de gestionar ese objeto, pasa a estado detached. Conserva todos sus datos, pero los cambios posteriores ya no se sincronizan automáticamente con la base de datos.</a:t>
+            </a:r>
+            <a:endParaRPr lang="en-US" sz="2100" dirty="0"/>
+          </a:p>
+        </p:txBody>
+      </p:sp>
+    </p:spTree>
+  </p:cSld>
+  <p:clrMapOvr>
+    <a:masterClrMapping/>
+  </p:clrMapOvr>
+</p:sld>
+</file>
+
+<file path=ppt/slides/slide11.xml><?xml version="1.0" encoding="utf-8"?>
+<p:sld xmlns:a="http://schemas.openxmlformats.org/drawingml/2006/main" xmlns:r="http://schemas.openxmlformats.org/officeDocument/2006/relationships" xmlns:p="http://schemas.openxmlformats.org/presentationml/2006/main">
   <p:cSld name="Slide 10">
     <p:spTree>
       <p:nvGrpSpPr>
@@ -4192,7 +4507,7 @@
 </p:sld>
 </file>
 
-<file path=ppt/slides/slide11.xml><?xml version="1.0" encoding="utf-8"?>
+<file path=ppt/slides/slide12.xml><?xml version="1.0" encoding="utf-8"?>
 <p:sld xmlns:a="http://schemas.openxmlformats.org/drawingml/2006/main" xmlns:r="http://schemas.openxmlformats.org/officeDocument/2006/relationships" xmlns:p="http://schemas.openxmlformats.org/presentationml/2006/main">
   <p:cSld name="Slide 11">
     <p:spTree>
@@ -4351,7 +4666,7 @@
 </p:sld>
 </file>
 
-<file path=ppt/slides/slide12.xml><?xml version="1.0" encoding="utf-8"?>
+<file path=ppt/slides/slide13.xml><?xml version="1.0" encoding="utf-8"?>
 <p:sld xmlns:a="http://schemas.openxmlformats.org/drawingml/2006/main" xmlns:r="http://schemas.openxmlformats.org/officeDocument/2006/relationships" xmlns:p="http://schemas.openxmlformats.org/presentationml/2006/main">
   <p:cSld name="Slide 12">
     <p:spTree>
@@ -4628,7 +4943,7 @@
 </p:sld>
 </file>
 
-<file path=ppt/slides/slide13.xml><?xml version="1.0" encoding="utf-8"?>
+<file path=ppt/slides/slide14.xml><?xml version="1.0" encoding="utf-8"?>
 <p:sld xmlns:a="http://schemas.openxmlformats.org/drawingml/2006/main" xmlns:r="http://schemas.openxmlformats.org/officeDocument/2006/relationships" xmlns:p="http://schemas.openxmlformats.org/presentationml/2006/main">
   <p:cSld name="Slide 13">
     <p:spTree>
@@ -4961,7 +5276,7 @@
 </p:sld>
 </file>
 
-<file path=ppt/slides/slide14.xml><?xml version="1.0" encoding="utf-8"?>
+<file path=ppt/slides/slide15.xml><?xml version="1.0" encoding="utf-8"?>
 <p:sld xmlns:a="http://schemas.openxmlformats.org/drawingml/2006/main" xmlns:r="http://schemas.openxmlformats.org/officeDocument/2006/relationships" xmlns:p="http://schemas.openxmlformats.org/presentationml/2006/main">
   <p:cSld name="Slide 14">
     <p:spTree>
@@ -5328,7 +5643,7 @@
 </p:sld>
 </file>
 
-<file path=ppt/slides/slide15.xml><?xml version="1.0" encoding="utf-8"?>
+<file path=ppt/slides/slide16.xml><?xml version="1.0" encoding="utf-8"?>
 <p:sld xmlns:a="http://schemas.openxmlformats.org/drawingml/2006/main" xmlns:r="http://schemas.openxmlformats.org/officeDocument/2006/relationships" xmlns:p="http://schemas.openxmlformats.org/presentationml/2006/main">
   <p:cSld name="Slide 15">
     <p:spTree>
@@ -5534,7 +5849,7 @@
 </p:sld>
 </file>
 
-<file path=ppt/slides/slide16.xml><?xml version="1.0" encoding="utf-8"?>
+<file path=ppt/slides/slide17.xml><?xml version="1.0" encoding="utf-8"?>
 <p:sld xmlns:a="http://schemas.openxmlformats.org/drawingml/2006/main" xmlns:r="http://schemas.openxmlformats.org/officeDocument/2006/relationships" xmlns:p="http://schemas.openxmlformats.org/presentationml/2006/main">
   <p:cSld name="Slide 16">
     <p:spTree>
@@ -7023,7 +7338,7 @@
 </p:sld>
 </file>
 
-<file path=ppt/slides/slide17.xml><?xml version="1.0" encoding="utf-8"?>
+<file path=ppt/slides/slide18.xml><?xml version="1.0" encoding="utf-8"?>
 <p:sld xmlns:a="http://schemas.openxmlformats.org/drawingml/2006/main" xmlns:r="http://schemas.openxmlformats.org/officeDocument/2006/relationships" xmlns:p="http://schemas.openxmlformats.org/presentationml/2006/main">
   <p:cSld name="Slide 17">
     <p:spTree>
@@ -7334,7 +7649,7 @@
 </p:sld>
 </file>
 
-<file path=ppt/slides/slide18.xml><?xml version="1.0" encoding="utf-8"?>
+<file path=ppt/slides/slide19.xml><?xml version="1.0" encoding="utf-8"?>
 <p:sld xmlns:a="http://schemas.openxmlformats.org/drawingml/2006/main" xmlns:r="http://schemas.openxmlformats.org/officeDocument/2006/relationships" xmlns:p="http://schemas.openxmlformats.org/presentationml/2006/main">
   <p:cSld name="Slide 18">
     <p:spTree>
@@ -7691,212 +8006,6 @@
               <a:t>UPDATE hibernate_sequence SET valor_actual = valor_actual + 1 WHERE entidad = 'videojuego'; -- 2. incrementa</a:t>
             </a:r>
             <a:endParaRPr lang="en-US" sz="1300" dirty="0"/>
-          </a:p>
-        </p:txBody>
-      </p:sp>
-    </p:spTree>
-  </p:cSld>
-  <p:clrMapOvr>
-    <a:masterClrMapping/>
-  </p:clrMapOvr>
-</p:sld>
-</file>
-
-<file path=ppt/slides/slide19.xml><?xml version="1.0" encoding="utf-8"?>
-<p:sld xmlns:a="http://schemas.openxmlformats.org/drawingml/2006/main" xmlns:r="http://schemas.openxmlformats.org/officeDocument/2006/relationships" xmlns:p="http://schemas.openxmlformats.org/presentationml/2006/main">
-  <p:cSld name="Slide 19">
-    <p:spTree>
-      <p:nvGrpSpPr>
-        <p:cNvPr id="1" name=""/>
-        <p:cNvGrpSpPr/>
-        <p:nvPr/>
-      </p:nvGrpSpPr>
-      <p:grpSpPr>
-        <a:xfrm>
-          <a:off x="0" y="0"/>
-          <a:ext cx="0" cy="0"/>
-          <a:chOff x="0" y="0"/>
-          <a:chExt cx="0" cy="0"/>
-        </a:xfrm>
-      </p:grpSpPr>
-      <p:sp>
-        <p:nvSpPr>
-          <p:cNvPr id="2" name="Shape 0"/>
-          <p:cNvSpPr/>
-          <p:nvPr/>
-        </p:nvSpPr>
-        <p:spPr>
-          <a:xfrm>
-            <a:off x="0" y="0"/>
-            <a:ext cx="12188952" cy="777240"/>
-          </a:xfrm>
-          <a:prstGeom prst="rect">
-            <a:avLst/>
-          </a:prstGeom>
-          <a:solidFill>
-            <a:srgbClr val="7F0000"/>
-          </a:solidFill>
-          <a:ln w="12700">
-            <a:solidFill>
-              <a:srgbClr val="7F0000"/>
-            </a:solidFill>
-            <a:prstDash val="solid"/>
-          </a:ln>
-        </p:spPr>
-        <p:txBody>
-          <a:bodyPr/>
-          <a:lstStyle/>
-          <a:p>
-            <a:endParaRPr lang="es-ES"/>
-          </a:p>
-        </p:txBody>
-      </p:sp>
-      <p:sp>
-        <p:nvSpPr>
-          <p:cNvPr id="3" name="Text 1"/>
-          <p:cNvSpPr/>
-          <p:nvPr/>
-        </p:nvSpPr>
-        <p:spPr>
-          <a:xfrm>
-            <a:off x="365760" y="0"/>
-            <a:ext cx="11457432" cy="777240"/>
-          </a:xfrm>
-          <a:prstGeom prst="rect">
-            <a:avLst/>
-          </a:prstGeom>
-          <a:noFill/>
-          <a:ln/>
-        </p:spPr>
-        <p:txBody>
-          <a:bodyPr wrap="square" rtlCol="0" anchor="ctr"/>
-          <a:lstStyle/>
-          <a:p>
-            <a:pPr marL="0" indent="0">
-              <a:buNone/>
-            </a:pPr>
-            <a:r>
-              <a:rPr lang="en-US" sz="2500" b="1" dirty="0">
-                <a:solidFill>
-                  <a:srgbClr val="FFFFFF"/>
-                </a:solidFill>
-                <a:latin typeface="Arial" pitchFamily="34" charset="0"/>
-                <a:ea typeface="Arial" pitchFamily="34" charset="-122"/>
-                <a:cs typeface="Arial" pitchFamily="34" charset="-120"/>
-              </a:rPr>
-              <a:t>TABLE (cont.) — por qué suele ser la menos eficiente</a:t>
-            </a:r>
-            <a:endParaRPr lang="en-US" sz="2500" dirty="0"/>
-          </a:p>
-        </p:txBody>
-      </p:sp>
-      <p:sp>
-        <p:nvSpPr>
-          <p:cNvPr id="4" name="Text 2"/>
-          <p:cNvSpPr/>
-          <p:nvPr/>
-        </p:nvSpPr>
-        <p:spPr>
-          <a:xfrm>
-            <a:off x="548640" y="6473952"/>
-            <a:ext cx="11091672" cy="292608"/>
-          </a:xfrm>
-          <a:prstGeom prst="rect">
-            <a:avLst/>
-          </a:prstGeom>
-          <a:noFill/>
-          <a:ln/>
-        </p:spPr>
-        <p:txBody>
-          <a:bodyPr wrap="square" rtlCol="0" anchor="ctr"/>
-          <a:lstStyle/>
-          <a:p>
-            <a:pPr marL="0" indent="0" algn="r">
-              <a:buNone/>
-            </a:pPr>
-            <a:r>
-              <a:rPr lang="en-US" sz="1100" dirty="0">
-                <a:solidFill>
-                  <a:srgbClr val="757575"/>
-                </a:solidFill>
-                <a:latin typeface="Arial" pitchFamily="34" charset="0"/>
-                <a:ea typeface="Arial" pitchFamily="34" charset="-122"/>
-                <a:cs typeface="Arial" pitchFamily="34" charset="-120"/>
-              </a:rPr>
-              <a:t>Acceso a Datos — Tema 1: Hibernate a fondo</a:t>
-            </a:r>
-            <a:endParaRPr lang="en-US" sz="1100" dirty="0"/>
-          </a:p>
-        </p:txBody>
-      </p:sp>
-      <p:sp>
-        <p:nvSpPr>
-          <p:cNvPr id="5" name="Shape 3"/>
-          <p:cNvSpPr/>
-          <p:nvPr/>
-        </p:nvSpPr>
-        <p:spPr>
-          <a:xfrm>
-            <a:off x="548640" y="2834640"/>
-            <a:ext cx="11091672" cy="1828800"/>
-          </a:xfrm>
-          <a:prstGeom prst="roundRect">
-            <a:avLst/>
-          </a:prstGeom>
-          <a:solidFill>
-            <a:srgbClr val="FBE9E7"/>
-          </a:solidFill>
-          <a:ln w="19050">
-            <a:solidFill>
-              <a:srgbClr val="E64A19"/>
-            </a:solidFill>
-            <a:prstDash val="solid"/>
-          </a:ln>
-        </p:spPr>
-        <p:txBody>
-          <a:bodyPr/>
-          <a:lstStyle/>
-          <a:p>
-            <a:endParaRPr lang="es-ES"/>
-          </a:p>
-        </p:txBody>
-      </p:sp>
-      <p:sp>
-        <p:nvSpPr>
-          <p:cNvPr id="6" name="Text 4"/>
-          <p:cNvSpPr/>
-          <p:nvPr/>
-        </p:nvSpPr>
-        <p:spPr>
-          <a:xfrm>
-            <a:off x="822960" y="2926080"/>
-            <a:ext cx="10543032" cy="1645920"/>
-          </a:xfrm>
-          <a:prstGeom prst="rect">
-            <a:avLst/>
-          </a:prstGeom>
-          <a:noFill/>
-          <a:ln/>
-        </p:spPr>
-        <p:txBody>
-          <a:bodyPr wrap="square" rtlCol="0" anchor="ctr"/>
-          <a:lstStyle/>
-          <a:p>
-            <a:pPr marL="0" indent="0">
-              <a:buNone/>
-            </a:pPr>
-            <a:r>
-              <a:rPr lang="en-US" sz="1900" dirty="0">
-                <a:solidFill>
-                  <a:srgbClr val="212121"/>
-                </a:solidFill>
-                <a:latin typeface="Arial" pitchFamily="34" charset="0"/>
-                <a:ea typeface="Arial" pitchFamily="34" charset="-122"/>
-                <a:cs typeface="Arial" pitchFamily="34" charset="-120"/>
-              </a:rPr>
-              <a:t>Es literalmente lo mismo que hace SEQUENCE por dentro — la diferencia es que SEQUENCE es un objeto del motor, optimizado para que muchas inserciones a la vez no se bloqueen entre sí; TABLE es una tabla corriente, y ese SELECT/UPDATE se bloquea como cualquier otra fila. Con muchas inserciones simultáneas se convierte en un cuello de botella.</a:t>
-            </a:r>
-            <a:endParaRPr lang="en-US" sz="1900" dirty="0"/>
           </a:p>
         </p:txBody>
       </p:sp>
@@ -8115,6 +8224,212 @@
 </file>
 
 <file path=ppt/slides/slide20.xml><?xml version="1.0" encoding="utf-8"?>
+<p:sld xmlns:a="http://schemas.openxmlformats.org/drawingml/2006/main" xmlns:r="http://schemas.openxmlformats.org/officeDocument/2006/relationships" xmlns:p="http://schemas.openxmlformats.org/presentationml/2006/main">
+  <p:cSld name="Slide 19">
+    <p:spTree>
+      <p:nvGrpSpPr>
+        <p:cNvPr id="1" name=""/>
+        <p:cNvGrpSpPr/>
+        <p:nvPr/>
+      </p:nvGrpSpPr>
+      <p:grpSpPr>
+        <a:xfrm>
+          <a:off x="0" y="0"/>
+          <a:ext cx="0" cy="0"/>
+          <a:chOff x="0" y="0"/>
+          <a:chExt cx="0" cy="0"/>
+        </a:xfrm>
+      </p:grpSpPr>
+      <p:sp>
+        <p:nvSpPr>
+          <p:cNvPr id="2" name="Shape 0"/>
+          <p:cNvSpPr/>
+          <p:nvPr/>
+        </p:nvSpPr>
+        <p:spPr>
+          <a:xfrm>
+            <a:off x="0" y="0"/>
+            <a:ext cx="12188952" cy="777240"/>
+          </a:xfrm>
+          <a:prstGeom prst="rect">
+            <a:avLst/>
+          </a:prstGeom>
+          <a:solidFill>
+            <a:srgbClr val="7F0000"/>
+          </a:solidFill>
+          <a:ln w="12700">
+            <a:solidFill>
+              <a:srgbClr val="7F0000"/>
+            </a:solidFill>
+            <a:prstDash val="solid"/>
+          </a:ln>
+        </p:spPr>
+        <p:txBody>
+          <a:bodyPr/>
+          <a:lstStyle/>
+          <a:p>
+            <a:endParaRPr lang="es-ES"/>
+          </a:p>
+        </p:txBody>
+      </p:sp>
+      <p:sp>
+        <p:nvSpPr>
+          <p:cNvPr id="3" name="Text 1"/>
+          <p:cNvSpPr/>
+          <p:nvPr/>
+        </p:nvSpPr>
+        <p:spPr>
+          <a:xfrm>
+            <a:off x="365760" y="0"/>
+            <a:ext cx="11457432" cy="777240"/>
+          </a:xfrm>
+          <a:prstGeom prst="rect">
+            <a:avLst/>
+          </a:prstGeom>
+          <a:noFill/>
+          <a:ln/>
+        </p:spPr>
+        <p:txBody>
+          <a:bodyPr wrap="square" rtlCol="0" anchor="ctr"/>
+          <a:lstStyle/>
+          <a:p>
+            <a:pPr marL="0" indent="0">
+              <a:buNone/>
+            </a:pPr>
+            <a:r>
+              <a:rPr lang="en-US" sz="2500" b="1" dirty="0">
+                <a:solidFill>
+                  <a:srgbClr val="FFFFFF"/>
+                </a:solidFill>
+                <a:latin typeface="Arial" pitchFamily="34" charset="0"/>
+                <a:ea typeface="Arial" pitchFamily="34" charset="-122"/>
+                <a:cs typeface="Arial" pitchFamily="34" charset="-120"/>
+              </a:rPr>
+              <a:t>TABLE (cont.) — por qué suele ser la menos eficiente</a:t>
+            </a:r>
+            <a:endParaRPr lang="en-US" sz="2500" dirty="0"/>
+          </a:p>
+        </p:txBody>
+      </p:sp>
+      <p:sp>
+        <p:nvSpPr>
+          <p:cNvPr id="4" name="Text 2"/>
+          <p:cNvSpPr/>
+          <p:nvPr/>
+        </p:nvSpPr>
+        <p:spPr>
+          <a:xfrm>
+            <a:off x="548640" y="6473952"/>
+            <a:ext cx="11091672" cy="292608"/>
+          </a:xfrm>
+          <a:prstGeom prst="rect">
+            <a:avLst/>
+          </a:prstGeom>
+          <a:noFill/>
+          <a:ln/>
+        </p:spPr>
+        <p:txBody>
+          <a:bodyPr wrap="square" rtlCol="0" anchor="ctr"/>
+          <a:lstStyle/>
+          <a:p>
+            <a:pPr marL="0" indent="0" algn="r">
+              <a:buNone/>
+            </a:pPr>
+            <a:r>
+              <a:rPr lang="en-US" sz="1100" dirty="0">
+                <a:solidFill>
+                  <a:srgbClr val="757575"/>
+                </a:solidFill>
+                <a:latin typeface="Arial" pitchFamily="34" charset="0"/>
+                <a:ea typeface="Arial" pitchFamily="34" charset="-122"/>
+                <a:cs typeface="Arial" pitchFamily="34" charset="-120"/>
+              </a:rPr>
+              <a:t>Acceso a Datos — Tema 1: Hibernate a fondo</a:t>
+            </a:r>
+            <a:endParaRPr lang="en-US" sz="1100" dirty="0"/>
+          </a:p>
+        </p:txBody>
+      </p:sp>
+      <p:sp>
+        <p:nvSpPr>
+          <p:cNvPr id="5" name="Shape 3"/>
+          <p:cNvSpPr/>
+          <p:nvPr/>
+        </p:nvSpPr>
+        <p:spPr>
+          <a:xfrm>
+            <a:off x="548640" y="2834640"/>
+            <a:ext cx="11091672" cy="1828800"/>
+          </a:xfrm>
+          <a:prstGeom prst="roundRect">
+            <a:avLst/>
+          </a:prstGeom>
+          <a:solidFill>
+            <a:srgbClr val="FBE9E7"/>
+          </a:solidFill>
+          <a:ln w="19050">
+            <a:solidFill>
+              <a:srgbClr val="E64A19"/>
+            </a:solidFill>
+            <a:prstDash val="solid"/>
+          </a:ln>
+        </p:spPr>
+        <p:txBody>
+          <a:bodyPr/>
+          <a:lstStyle/>
+          <a:p>
+            <a:endParaRPr lang="es-ES"/>
+          </a:p>
+        </p:txBody>
+      </p:sp>
+      <p:sp>
+        <p:nvSpPr>
+          <p:cNvPr id="6" name="Text 4"/>
+          <p:cNvSpPr/>
+          <p:nvPr/>
+        </p:nvSpPr>
+        <p:spPr>
+          <a:xfrm>
+            <a:off x="822960" y="2926080"/>
+            <a:ext cx="10543032" cy="1645920"/>
+          </a:xfrm>
+          <a:prstGeom prst="rect">
+            <a:avLst/>
+          </a:prstGeom>
+          <a:noFill/>
+          <a:ln/>
+        </p:spPr>
+        <p:txBody>
+          <a:bodyPr wrap="square" rtlCol="0" anchor="ctr"/>
+          <a:lstStyle/>
+          <a:p>
+            <a:pPr marL="0" indent="0">
+              <a:buNone/>
+            </a:pPr>
+            <a:r>
+              <a:rPr lang="en-US" sz="1900" dirty="0">
+                <a:solidFill>
+                  <a:srgbClr val="212121"/>
+                </a:solidFill>
+                <a:latin typeface="Arial" pitchFamily="34" charset="0"/>
+                <a:ea typeface="Arial" pitchFamily="34" charset="-122"/>
+                <a:cs typeface="Arial" pitchFamily="34" charset="-120"/>
+              </a:rPr>
+              <a:t>Es literalmente lo mismo que hace SEQUENCE por dentro — la diferencia es que SEQUENCE es un objeto del motor, optimizado para que muchas inserciones a la vez no se bloqueen entre sí; TABLE es una tabla corriente, y ese SELECT/UPDATE se bloquea como cualquier otra fila. Con muchas inserciones simultáneas se convierte en un cuello de botella.</a:t>
+            </a:r>
+            <a:endParaRPr lang="en-US" sz="1900" dirty="0"/>
+          </a:p>
+        </p:txBody>
+      </p:sp>
+    </p:spTree>
+  </p:cSld>
+  <p:clrMapOvr>
+    <a:masterClrMapping/>
+  </p:clrMapOvr>
+</p:sld>
+</file>
+
+<file path=ppt/slides/slide21.xml><?xml version="1.0" encoding="utf-8"?>
 <p:sld xmlns:a="http://schemas.openxmlformats.org/drawingml/2006/main" xmlns:r="http://schemas.openxmlformats.org/officeDocument/2006/relationships" xmlns:p="http://schemas.openxmlformats.org/presentationml/2006/main">
   <p:cSld name="Slide 20">
     <p:spTree>
@@ -9181,7 +9496,7 @@
 </p:sld>
 </file>
 
-<file path=ppt/slides/slide21.xml><?xml version="1.0" encoding="utf-8"?>
+<file path=ppt/slides/slide22.xml><?xml version="1.0" encoding="utf-8"?>
 <p:sld xmlns:a="http://schemas.openxmlformats.org/drawingml/2006/main" xmlns:r="http://schemas.openxmlformats.org/officeDocument/2006/relationships" xmlns:p="http://schemas.openxmlformats.org/presentationml/2006/main">
   <p:cSld name="Slide 21">
     <p:spTree>
@@ -9387,7 +9702,7 @@
 </p:sld>
 </file>
 
-<file path=ppt/slides/slide22.xml><?xml version="1.0" encoding="utf-8"?>
+<file path=ppt/slides/slide23.xml><?xml version="1.0" encoding="utf-8"?>
 <p:sld xmlns:a="http://schemas.openxmlformats.org/drawingml/2006/main" xmlns:r="http://schemas.openxmlformats.org/officeDocument/2006/relationships" xmlns:p="http://schemas.openxmlformats.org/presentationml/2006/main">
   <p:cSld name="Slide 22">
     <p:spTree>
@@ -9593,7 +9908,7 @@
 </p:sld>
 </file>
 
-<file path=ppt/slides/slide23.xml><?xml version="1.0" encoding="utf-8"?>
+<file path=ppt/slides/slide24.xml><?xml version="1.0" encoding="utf-8"?>
 <p:sld xmlns:a="http://schemas.openxmlformats.org/drawingml/2006/main" xmlns:r="http://schemas.openxmlformats.org/officeDocument/2006/relationships" xmlns:p="http://schemas.openxmlformats.org/presentationml/2006/main">
   <p:cSld name="Slide 23">
     <p:spTree>
@@ -9752,7 +10067,7 @@
 </p:sld>
 </file>
 
-<file path=ppt/slides/slide24.xml><?xml version="1.0" encoding="utf-8"?>
+<file path=ppt/slides/slide25.xml><?xml version="1.0" encoding="utf-8"?>
 <p:sld xmlns:a="http://schemas.openxmlformats.org/drawingml/2006/main" xmlns:r="http://schemas.openxmlformats.org/officeDocument/2006/relationships" xmlns:p="http://schemas.openxmlformats.org/presentationml/2006/main">
   <p:cSld name="Slide 24">
     <p:spTree>
@@ -9958,7 +10273,7 @@
 </p:sld>
 </file>
 
-<file path=ppt/slides/slide25.xml><?xml version="1.0" encoding="utf-8"?>
+<file path=ppt/slides/slide26.xml><?xml version="1.0" encoding="utf-8"?>
 <p:sld xmlns:a="http://schemas.openxmlformats.org/drawingml/2006/main" xmlns:r="http://schemas.openxmlformats.org/officeDocument/2006/relationships" xmlns:p="http://schemas.openxmlformats.org/presentationml/2006/main">
   <p:cSld name="Slide 25">
     <p:spTree>
@@ -11175,7 +11490,7 @@
 </p:sld>
 </file>
 
-<file path=ppt/slides/slide26.xml><?xml version="1.0" encoding="utf-8"?>
+<file path=ppt/slides/slide27.xml><?xml version="1.0" encoding="utf-8"?>
 <p:sld xmlns:a="http://schemas.openxmlformats.org/drawingml/2006/main" xmlns:r="http://schemas.openxmlformats.org/officeDocument/2006/relationships" xmlns:p="http://schemas.openxmlformats.org/presentationml/2006/main">
   <p:cSld name="Slide 26">
     <p:spTree>
@@ -11459,7 +11774,7 @@
 </p:sld>
 </file>
 
-<file path=ppt/slides/slide27.xml><?xml version="1.0" encoding="utf-8"?>
+<file path=ppt/slides/slide28.xml><?xml version="1.0" encoding="utf-8"?>
 <p:sld xmlns:a="http://schemas.openxmlformats.org/drawingml/2006/main" xmlns:r="http://schemas.openxmlformats.org/officeDocument/2006/relationships" xmlns:p="http://schemas.openxmlformats.org/presentationml/2006/main">
   <p:cSld name="Slide 27">
     <p:spTree>
@@ -12104,7 +12419,7 @@
 </p:sld>
 </file>
 
-<file path=ppt/slides/slide28.xml><?xml version="1.0" encoding="utf-8"?>
+<file path=ppt/slides/slide29.xml><?xml version="1.0" encoding="utf-8"?>
 <p:sld xmlns:a="http://schemas.openxmlformats.org/drawingml/2006/main" xmlns:r="http://schemas.openxmlformats.org/officeDocument/2006/relationships" xmlns:p="http://schemas.openxmlformats.org/presentationml/2006/main">
   <p:cSld name="Slide 28">
     <p:spTree>
@@ -12336,212 +12651,6 @@
                 <a:cs typeface="Arial" pitchFamily="34" charset="-120"/>
               </a:rPr>
               <a:t>La cascada se declara en el lado Estudio → Videojuego (el lado "uno" de la relación) porque no tendría sentido al revés: borrar un solo videojuego no debería llevarse por delante el estudio entero.</a:t>
-            </a:r>
-            <a:endParaRPr lang="en-US" sz="1900" dirty="0"/>
-          </a:p>
-        </p:txBody>
-      </p:sp>
-    </p:spTree>
-  </p:cSld>
-  <p:clrMapOvr>
-    <a:masterClrMapping/>
-  </p:clrMapOvr>
-</p:sld>
-</file>
-
-<file path=ppt/slides/slide29.xml><?xml version="1.0" encoding="utf-8"?>
-<p:sld xmlns:a="http://schemas.openxmlformats.org/drawingml/2006/main" xmlns:r="http://schemas.openxmlformats.org/officeDocument/2006/relationships" xmlns:p="http://schemas.openxmlformats.org/presentationml/2006/main">
-  <p:cSld name="Slide 29">
-    <p:spTree>
-      <p:nvGrpSpPr>
-        <p:cNvPr id="1" name=""/>
-        <p:cNvGrpSpPr/>
-        <p:nvPr/>
-      </p:nvGrpSpPr>
-      <p:grpSpPr>
-        <a:xfrm>
-          <a:off x="0" y="0"/>
-          <a:ext cx="0" cy="0"/>
-          <a:chOff x="0" y="0"/>
-          <a:chExt cx="0" cy="0"/>
-        </a:xfrm>
-      </p:grpSpPr>
-      <p:sp>
-        <p:nvSpPr>
-          <p:cNvPr id="2" name="Shape 0"/>
-          <p:cNvSpPr/>
-          <p:nvPr/>
-        </p:nvSpPr>
-        <p:spPr>
-          <a:xfrm>
-            <a:off x="0" y="0"/>
-            <a:ext cx="12188952" cy="777240"/>
-          </a:xfrm>
-          <a:prstGeom prst="rect">
-            <a:avLst/>
-          </a:prstGeom>
-          <a:solidFill>
-            <a:srgbClr val="7F0000"/>
-          </a:solidFill>
-          <a:ln w="12700">
-            <a:solidFill>
-              <a:srgbClr val="7F0000"/>
-            </a:solidFill>
-            <a:prstDash val="solid"/>
-          </a:ln>
-        </p:spPr>
-        <p:txBody>
-          <a:bodyPr/>
-          <a:lstStyle/>
-          <a:p>
-            <a:endParaRPr lang="es-ES"/>
-          </a:p>
-        </p:txBody>
-      </p:sp>
-      <p:sp>
-        <p:nvSpPr>
-          <p:cNvPr id="3" name="Text 1"/>
-          <p:cNvSpPr/>
-          <p:nvPr/>
-        </p:nvSpPr>
-        <p:spPr>
-          <a:xfrm>
-            <a:off x="365760" y="0"/>
-            <a:ext cx="11457432" cy="777240"/>
-          </a:xfrm>
-          <a:prstGeom prst="rect">
-            <a:avLst/>
-          </a:prstGeom>
-          <a:noFill/>
-          <a:ln/>
-        </p:spPr>
-        <p:txBody>
-          <a:bodyPr wrap="square" rtlCol="0" anchor="ctr"/>
-          <a:lstStyle/>
-          <a:p>
-            <a:pPr marL="0" indent="0">
-              <a:buNone/>
-            </a:pPr>
-            <a:r>
-              <a:rPr lang="en-US" sz="2500" b="1" dirty="0">
-                <a:solidFill>
-                  <a:srgbClr val="FFFFFF"/>
-                </a:solidFill>
-                <a:latin typeface="Arial" pitchFamily="34" charset="0"/>
-                <a:ea typeface="Arial" pitchFamily="34" charset="-122"/>
-                <a:cs typeface="Arial" pitchFamily="34" charset="-120"/>
-              </a:rPr>
-              <a:t>Configuración avanzada: cuando el mapeo no es directo</a:t>
-            </a:r>
-            <a:endParaRPr lang="en-US" sz="2500" dirty="0"/>
-          </a:p>
-        </p:txBody>
-      </p:sp>
-      <p:sp>
-        <p:nvSpPr>
-          <p:cNvPr id="4" name="Text 2"/>
-          <p:cNvSpPr/>
-          <p:nvPr/>
-        </p:nvSpPr>
-        <p:spPr>
-          <a:xfrm>
-            <a:off x="548640" y="6473952"/>
-            <a:ext cx="11091672" cy="292608"/>
-          </a:xfrm>
-          <a:prstGeom prst="rect">
-            <a:avLst/>
-          </a:prstGeom>
-          <a:noFill/>
-          <a:ln/>
-        </p:spPr>
-        <p:txBody>
-          <a:bodyPr wrap="square" rtlCol="0" anchor="ctr"/>
-          <a:lstStyle/>
-          <a:p>
-            <a:pPr marL="0" indent="0" algn="r">
-              <a:buNone/>
-            </a:pPr>
-            <a:r>
-              <a:rPr lang="en-US" sz="1100" dirty="0">
-                <a:solidFill>
-                  <a:srgbClr val="757575"/>
-                </a:solidFill>
-                <a:latin typeface="Arial" pitchFamily="34" charset="0"/>
-                <a:ea typeface="Arial" pitchFamily="34" charset="-122"/>
-                <a:cs typeface="Arial" pitchFamily="34" charset="-120"/>
-              </a:rPr>
-              <a:t>Acceso a Datos — Tema 1: Hibernate a fondo</a:t>
-            </a:r>
-            <a:endParaRPr lang="en-US" sz="1100" dirty="0"/>
-          </a:p>
-        </p:txBody>
-      </p:sp>
-      <p:sp>
-        <p:nvSpPr>
-          <p:cNvPr id="5" name="Shape 3"/>
-          <p:cNvSpPr/>
-          <p:nvPr/>
-        </p:nvSpPr>
-        <p:spPr>
-          <a:xfrm>
-            <a:off x="548640" y="2468880"/>
-            <a:ext cx="11091672" cy="1737360"/>
-          </a:xfrm>
-          <a:prstGeom prst="roundRect">
-            <a:avLst/>
-          </a:prstGeom>
-          <a:solidFill>
-            <a:srgbClr val="FBE9E7"/>
-          </a:solidFill>
-          <a:ln w="19050">
-            <a:solidFill>
-              <a:srgbClr val="E64A19"/>
-            </a:solidFill>
-            <a:prstDash val="solid"/>
-          </a:ln>
-        </p:spPr>
-        <p:txBody>
-          <a:bodyPr/>
-          <a:lstStyle/>
-          <a:p>
-            <a:endParaRPr lang="es-ES"/>
-          </a:p>
-        </p:txBody>
-      </p:sp>
-      <p:sp>
-        <p:nvSpPr>
-          <p:cNvPr id="6" name="Text 4"/>
-          <p:cNvSpPr/>
-          <p:nvPr/>
-        </p:nvSpPr>
-        <p:spPr>
-          <a:xfrm>
-            <a:off x="822960" y="2560320"/>
-            <a:ext cx="10543032" cy="1554480"/>
-          </a:xfrm>
-          <a:prstGeom prst="rect">
-            <a:avLst/>
-          </a:prstGeom>
-          <a:noFill/>
-          <a:ln/>
-        </p:spPr>
-        <p:txBody>
-          <a:bodyPr wrap="square" rtlCol="0" anchor="ctr"/>
-          <a:lstStyle/>
-          <a:p>
-            <a:pPr marL="0" indent="0">
-              <a:buNone/>
-            </a:pPr>
-            <a:r>
-              <a:rPr lang="en-US" sz="1900" dirty="0">
-                <a:solidFill>
-                  <a:srgbClr val="212121"/>
-                </a:solidFill>
-                <a:latin typeface="Arial" pitchFamily="34" charset="0"/>
-                <a:ea typeface="Arial" pitchFamily="34" charset="-122"/>
-                <a:cs typeface="Arial" pitchFamily="34" charset="-120"/>
-              </a:rPr>
-              <a:t>Hibernate necesita, a veces, ayuda extra para mapear tipos sin correspondencia directa con una columna estándar — por ejemplo, para cifrar un campo o dar formato propio a un tipo que Hibernate no reconoce. Esa ayuda se declara con un @Converter (una clase AttributeConverter): no necesitas escribir uno todavía, basta con saber que es ahí donde se completa el mapeo automático.</a:t>
             </a:r>
             <a:endParaRPr lang="en-US" sz="1900" dirty="0"/>
           </a:p>
@@ -13413,6 +13522,212 @@
 
 <file path=ppt/slides/slide30.xml><?xml version="1.0" encoding="utf-8"?>
 <p:sld xmlns:a="http://schemas.openxmlformats.org/drawingml/2006/main" xmlns:r="http://schemas.openxmlformats.org/officeDocument/2006/relationships" xmlns:p="http://schemas.openxmlformats.org/presentationml/2006/main">
+  <p:cSld name="Slide 29">
+    <p:spTree>
+      <p:nvGrpSpPr>
+        <p:cNvPr id="1" name=""/>
+        <p:cNvGrpSpPr/>
+        <p:nvPr/>
+      </p:nvGrpSpPr>
+      <p:grpSpPr>
+        <a:xfrm>
+          <a:off x="0" y="0"/>
+          <a:ext cx="0" cy="0"/>
+          <a:chOff x="0" y="0"/>
+          <a:chExt cx="0" cy="0"/>
+        </a:xfrm>
+      </p:grpSpPr>
+      <p:sp>
+        <p:nvSpPr>
+          <p:cNvPr id="2" name="Shape 0"/>
+          <p:cNvSpPr/>
+          <p:nvPr/>
+        </p:nvSpPr>
+        <p:spPr>
+          <a:xfrm>
+            <a:off x="0" y="0"/>
+            <a:ext cx="12188952" cy="777240"/>
+          </a:xfrm>
+          <a:prstGeom prst="rect">
+            <a:avLst/>
+          </a:prstGeom>
+          <a:solidFill>
+            <a:srgbClr val="7F0000"/>
+          </a:solidFill>
+          <a:ln w="12700">
+            <a:solidFill>
+              <a:srgbClr val="7F0000"/>
+            </a:solidFill>
+            <a:prstDash val="solid"/>
+          </a:ln>
+        </p:spPr>
+        <p:txBody>
+          <a:bodyPr/>
+          <a:lstStyle/>
+          <a:p>
+            <a:endParaRPr lang="es-ES"/>
+          </a:p>
+        </p:txBody>
+      </p:sp>
+      <p:sp>
+        <p:nvSpPr>
+          <p:cNvPr id="3" name="Text 1"/>
+          <p:cNvSpPr/>
+          <p:nvPr/>
+        </p:nvSpPr>
+        <p:spPr>
+          <a:xfrm>
+            <a:off x="365760" y="0"/>
+            <a:ext cx="11457432" cy="777240"/>
+          </a:xfrm>
+          <a:prstGeom prst="rect">
+            <a:avLst/>
+          </a:prstGeom>
+          <a:noFill/>
+          <a:ln/>
+        </p:spPr>
+        <p:txBody>
+          <a:bodyPr wrap="square" rtlCol="0" anchor="ctr"/>
+          <a:lstStyle/>
+          <a:p>
+            <a:pPr marL="0" indent="0">
+              <a:buNone/>
+            </a:pPr>
+            <a:r>
+              <a:rPr lang="en-US" sz="2500" b="1" dirty="0">
+                <a:solidFill>
+                  <a:srgbClr val="FFFFFF"/>
+                </a:solidFill>
+                <a:latin typeface="Arial" pitchFamily="34" charset="0"/>
+                <a:ea typeface="Arial" pitchFamily="34" charset="-122"/>
+                <a:cs typeface="Arial" pitchFamily="34" charset="-120"/>
+              </a:rPr>
+              <a:t>Configuración avanzada: cuando el mapeo no es directo</a:t>
+            </a:r>
+            <a:endParaRPr lang="en-US" sz="2500" dirty="0"/>
+          </a:p>
+        </p:txBody>
+      </p:sp>
+      <p:sp>
+        <p:nvSpPr>
+          <p:cNvPr id="4" name="Text 2"/>
+          <p:cNvSpPr/>
+          <p:nvPr/>
+        </p:nvSpPr>
+        <p:spPr>
+          <a:xfrm>
+            <a:off x="548640" y="6473952"/>
+            <a:ext cx="11091672" cy="292608"/>
+          </a:xfrm>
+          <a:prstGeom prst="rect">
+            <a:avLst/>
+          </a:prstGeom>
+          <a:noFill/>
+          <a:ln/>
+        </p:spPr>
+        <p:txBody>
+          <a:bodyPr wrap="square" rtlCol="0" anchor="ctr"/>
+          <a:lstStyle/>
+          <a:p>
+            <a:pPr marL="0" indent="0" algn="r">
+              <a:buNone/>
+            </a:pPr>
+            <a:r>
+              <a:rPr lang="en-US" sz="1100" dirty="0">
+                <a:solidFill>
+                  <a:srgbClr val="757575"/>
+                </a:solidFill>
+                <a:latin typeface="Arial" pitchFamily="34" charset="0"/>
+                <a:ea typeface="Arial" pitchFamily="34" charset="-122"/>
+                <a:cs typeface="Arial" pitchFamily="34" charset="-120"/>
+              </a:rPr>
+              <a:t>Acceso a Datos — Tema 1: Hibernate a fondo</a:t>
+            </a:r>
+            <a:endParaRPr lang="en-US" sz="1100" dirty="0"/>
+          </a:p>
+        </p:txBody>
+      </p:sp>
+      <p:sp>
+        <p:nvSpPr>
+          <p:cNvPr id="5" name="Shape 3"/>
+          <p:cNvSpPr/>
+          <p:nvPr/>
+        </p:nvSpPr>
+        <p:spPr>
+          <a:xfrm>
+            <a:off x="548640" y="2468880"/>
+            <a:ext cx="11091672" cy="1737360"/>
+          </a:xfrm>
+          <a:prstGeom prst="roundRect">
+            <a:avLst/>
+          </a:prstGeom>
+          <a:solidFill>
+            <a:srgbClr val="FBE9E7"/>
+          </a:solidFill>
+          <a:ln w="19050">
+            <a:solidFill>
+              <a:srgbClr val="E64A19"/>
+            </a:solidFill>
+            <a:prstDash val="solid"/>
+          </a:ln>
+        </p:spPr>
+        <p:txBody>
+          <a:bodyPr/>
+          <a:lstStyle/>
+          <a:p>
+            <a:endParaRPr lang="es-ES"/>
+          </a:p>
+        </p:txBody>
+      </p:sp>
+      <p:sp>
+        <p:nvSpPr>
+          <p:cNvPr id="6" name="Text 4"/>
+          <p:cNvSpPr/>
+          <p:nvPr/>
+        </p:nvSpPr>
+        <p:spPr>
+          <a:xfrm>
+            <a:off x="822960" y="2560320"/>
+            <a:ext cx="10543032" cy="1554480"/>
+          </a:xfrm>
+          <a:prstGeom prst="rect">
+            <a:avLst/>
+          </a:prstGeom>
+          <a:noFill/>
+          <a:ln/>
+        </p:spPr>
+        <p:txBody>
+          <a:bodyPr wrap="square" rtlCol="0" anchor="ctr"/>
+          <a:lstStyle/>
+          <a:p>
+            <a:pPr marL="0" indent="0">
+              <a:buNone/>
+            </a:pPr>
+            <a:r>
+              <a:rPr lang="en-US" sz="1900" dirty="0">
+                <a:solidFill>
+                  <a:srgbClr val="212121"/>
+                </a:solidFill>
+                <a:latin typeface="Arial" pitchFamily="34" charset="0"/>
+                <a:ea typeface="Arial" pitchFamily="34" charset="-122"/>
+                <a:cs typeface="Arial" pitchFamily="34" charset="-120"/>
+              </a:rPr>
+              <a:t>Hibernate necesita, a veces, ayuda extra para mapear tipos sin correspondencia directa con una columna estándar — por ejemplo, para cifrar un campo o dar formato propio a un tipo que Hibernate no reconoce. Esa ayuda se declara con un @Converter (una clase AttributeConverter): no necesitas escribir uno todavía, basta con saber que es ahí donde se completa el mapeo automático.</a:t>
+            </a:r>
+            <a:endParaRPr lang="en-US" sz="1900" dirty="0"/>
+          </a:p>
+        </p:txBody>
+      </p:sp>
+    </p:spTree>
+  </p:cSld>
+  <p:clrMapOvr>
+    <a:masterClrMapping/>
+  </p:clrMapOvr>
+</p:sld>
+</file>
+
+<file path=ppt/slides/slide31.xml><?xml version="1.0" encoding="utf-8"?>
+<p:sld xmlns:a="http://schemas.openxmlformats.org/drawingml/2006/main" xmlns:r="http://schemas.openxmlformats.org/officeDocument/2006/relationships" xmlns:p="http://schemas.openxmlformats.org/presentationml/2006/main">
   <p:cSld name="Slide 30">
     <p:spTree>
       <p:nvGrpSpPr>
@@ -13656,7 +13971,7 @@
 </p:sld>
 </file>
 
-<file path=ppt/slides/slide31.xml><?xml version="1.0" encoding="utf-8"?>
+<file path=ppt/slides/slide32.xml><?xml version="1.0" encoding="utf-8"?>
 <p:sld xmlns:a="http://schemas.openxmlformats.org/drawingml/2006/main" xmlns:r="http://schemas.openxmlformats.org/officeDocument/2006/relationships" xmlns:p="http://schemas.openxmlformats.org/presentationml/2006/main">
   <p:cSld name="Slide 31">
     <p:spTree>
@@ -14405,7 +14720,7 @@
 </p:sld>
 </file>
 
-<file path=ppt/slides/slide32.xml><?xml version="1.0" encoding="utf-8"?>
+<file path=ppt/slides/slide33.xml><?xml version="1.0" encoding="utf-8"?>
 <p:sld xmlns:a="http://schemas.openxmlformats.org/drawingml/2006/main" xmlns:r="http://schemas.openxmlformats.org/officeDocument/2006/relationships" xmlns:p="http://schemas.openxmlformats.org/presentationml/2006/main">
   <p:cSld name="Slide 32">
     <p:spTree>
@@ -14699,7 +15014,7 @@
 </p:sld>
 </file>
 
-<file path=ppt/slides/slide33.xml><?xml version="1.0" encoding="utf-8"?>
+<file path=ppt/slides/slide34.xml><?xml version="1.0" encoding="utf-8"?>
 <p:sld xmlns:a="http://schemas.openxmlformats.org/drawingml/2006/main" xmlns:r="http://schemas.openxmlformats.org/officeDocument/2006/relationships" xmlns:p="http://schemas.openxmlformats.org/presentationml/2006/main">
   <p:cSld name="Slide 33">
     <p:spTree>
@@ -15126,7 +15441,7 @@
 </p:sld>
 </file>
 
-<file path=ppt/slides/slide34.xml><?xml version="1.0" encoding="utf-8"?>
+<file path=ppt/slides/slide35.xml><?xml version="1.0" encoding="utf-8"?>
 <p:sld xmlns:a="http://schemas.openxmlformats.org/drawingml/2006/main" xmlns:r="http://schemas.openxmlformats.org/officeDocument/2006/relationships" xmlns:p="http://schemas.openxmlformats.org/presentationml/2006/main">
   <p:cSld name="Slide 34">
     <p:spTree>
@@ -15453,7 +15768,7 @@
 </p:sld>
 </file>
 
-<file path=ppt/slides/slide35.xml><?xml version="1.0" encoding="utf-8"?>
+<file path=ppt/slides/slide36.xml><?xml version="1.0" encoding="utf-8"?>
 <p:sld xmlns:a="http://schemas.openxmlformats.org/drawingml/2006/main" xmlns:r="http://schemas.openxmlformats.org/officeDocument/2006/relationships" xmlns:p="http://schemas.openxmlformats.org/presentationml/2006/main">
   <p:cSld name="Slide 35">
     <p:spTree>
@@ -15694,7 +16009,7 @@
 </p:sld>
 </file>
 
-<file path=ppt/slides/slide36.xml><?xml version="1.0" encoding="utf-8"?>
+<file path=ppt/slides/slide37.xml><?xml version="1.0" encoding="utf-8"?>
 <p:sld xmlns:a="http://schemas.openxmlformats.org/drawingml/2006/main" xmlns:r="http://schemas.openxmlformats.org/officeDocument/2006/relationships" xmlns:p="http://schemas.openxmlformats.org/presentationml/2006/main">
   <p:cSld name="Slide 36">
     <p:spTree>
@@ -16402,6 +16717,201 @@
 
 <file path=ppt/slides/slide6.xml><?xml version="1.0" encoding="utf-8"?>
 <p:sld xmlns:a="http://schemas.openxmlformats.org/drawingml/2006/main" xmlns:r="http://schemas.openxmlformats.org/officeDocument/2006/relationships" xmlns:p="http://schemas.openxmlformats.org/presentationml/2006/main">
+  <p:cSld>
+    <p:spTree>
+      <p:nvGrpSpPr>
+        <p:cNvPr id="1" name="">
+          <a:extLst>
+            <a:ext uri="{FF2B5EF4-FFF2-40B4-BE49-F238E27FC236}">
+              <a16:creationId xmlns:a16="http://schemas.microsoft.com/office/drawing/2014/main" id="{0B7D6C59-69C9-C677-73C3-A939EAE38417}"/>
+            </a:ext>
+          </a:extLst>
+        </p:cNvPr>
+        <p:cNvGrpSpPr/>
+        <p:nvPr/>
+      </p:nvGrpSpPr>
+      <p:grpSpPr>
+        <a:xfrm>
+          <a:off x="0" y="0"/>
+          <a:ext cx="0" cy="0"/>
+          <a:chOff x="0" y="0"/>
+          <a:chExt cx="0" cy="0"/>
+        </a:xfrm>
+      </p:grpSpPr>
+      <p:sp>
+        <p:nvSpPr>
+          <p:cNvPr id="2" name="Shape 0">
+            <a:extLst>
+              <a:ext uri="{FF2B5EF4-FFF2-40B4-BE49-F238E27FC236}">
+                <a16:creationId xmlns:a16="http://schemas.microsoft.com/office/drawing/2014/main" id="{1960F046-677D-32F7-E640-DA916A21C801}"/>
+              </a:ext>
+            </a:extLst>
+          </p:cNvPr>
+          <p:cNvSpPr/>
+          <p:nvPr/>
+        </p:nvSpPr>
+        <p:spPr>
+          <a:xfrm>
+            <a:off x="0" y="0"/>
+            <a:ext cx="12188952" cy="777240"/>
+          </a:xfrm>
+          <a:prstGeom prst="rect">
+            <a:avLst/>
+          </a:prstGeom>
+          <a:solidFill>
+            <a:srgbClr val="7F0000"/>
+          </a:solidFill>
+          <a:ln w="12700">
+            <a:solidFill>
+              <a:srgbClr val="7F0000"/>
+            </a:solidFill>
+            <a:prstDash val="solid"/>
+          </a:ln>
+        </p:spPr>
+        <p:txBody>
+          <a:bodyPr/>
+          <a:lstStyle/>
+          <a:p>
+            <a:endParaRPr lang="es-ES"/>
+          </a:p>
+        </p:txBody>
+      </p:sp>
+      <p:sp>
+        <p:nvSpPr>
+          <p:cNvPr id="3" name="Text 1">
+            <a:extLst>
+              <a:ext uri="{FF2B5EF4-FFF2-40B4-BE49-F238E27FC236}">
+                <a16:creationId xmlns:a16="http://schemas.microsoft.com/office/drawing/2014/main" id="{17BD8020-104B-DAB8-0A49-614771279DEE}"/>
+              </a:ext>
+            </a:extLst>
+          </p:cNvPr>
+          <p:cNvSpPr/>
+          <p:nvPr/>
+        </p:nvSpPr>
+        <p:spPr>
+          <a:xfrm>
+            <a:off x="365760" y="0"/>
+            <a:ext cx="11457432" cy="777240"/>
+          </a:xfrm>
+          <a:prstGeom prst="rect">
+            <a:avLst/>
+          </a:prstGeom>
+          <a:noFill/>
+          <a:ln/>
+        </p:spPr>
+        <p:txBody>
+          <a:bodyPr wrap="square" rtlCol="0" anchor="ctr"/>
+          <a:lstStyle/>
+          <a:p>
+            <a:pPr marL="0" indent="0">
+              <a:buNone/>
+            </a:pPr>
+            <a:r>
+              <a:rPr lang="en-US" sz="2500" b="1" dirty="0">
+                <a:solidFill>
+                  <a:srgbClr val="FFFFFF"/>
+                </a:solidFill>
+                <a:latin typeface="Arial" pitchFamily="34" charset="0"/>
+                <a:ea typeface="Arial" pitchFamily="34" charset="-122"/>
+                <a:cs typeface="Arial" pitchFamily="34" charset="-120"/>
+              </a:rPr>
+              <a:t>Los estados de un objeto en el ORM</a:t>
+            </a:r>
+            <a:endParaRPr lang="en-US" sz="2500" dirty="0"/>
+          </a:p>
+        </p:txBody>
+      </p:sp>
+      <p:sp>
+        <p:nvSpPr>
+          <p:cNvPr id="4" name="Text 2">
+            <a:extLst>
+              <a:ext uri="{FF2B5EF4-FFF2-40B4-BE49-F238E27FC236}">
+                <a16:creationId xmlns:a16="http://schemas.microsoft.com/office/drawing/2014/main" id="{912DB59A-4EF4-604B-8522-EE633767E5A1}"/>
+              </a:ext>
+            </a:extLst>
+          </p:cNvPr>
+          <p:cNvSpPr/>
+          <p:nvPr/>
+        </p:nvSpPr>
+        <p:spPr>
+          <a:xfrm>
+            <a:off x="548640" y="6473952"/>
+            <a:ext cx="11091672" cy="292608"/>
+          </a:xfrm>
+          <a:prstGeom prst="rect">
+            <a:avLst/>
+          </a:prstGeom>
+          <a:noFill/>
+          <a:ln/>
+        </p:spPr>
+        <p:txBody>
+          <a:bodyPr wrap="square" rtlCol="0" anchor="ctr"/>
+          <a:lstStyle/>
+          <a:p>
+            <a:pPr marL="0" indent="0" algn="r">
+              <a:buNone/>
+            </a:pPr>
+            <a:r>
+              <a:rPr lang="en-US" sz="1100" dirty="0">
+                <a:solidFill>
+                  <a:srgbClr val="757575"/>
+                </a:solidFill>
+                <a:latin typeface="Arial" pitchFamily="34" charset="0"/>
+                <a:ea typeface="Arial" pitchFamily="34" charset="-122"/>
+                <a:cs typeface="Arial" pitchFamily="34" charset="-120"/>
+              </a:rPr>
+              <a:t>Acceso a Datos — Tema 1: Hibernate a fondo</a:t>
+            </a:r>
+            <a:endParaRPr lang="en-US" sz="1100" dirty="0"/>
+          </a:p>
+        </p:txBody>
+      </p:sp>
+      <p:pic>
+        <p:nvPicPr>
+          <p:cNvPr id="8" name="Imagen 7">
+            <a:extLst>
+              <a:ext uri="{FF2B5EF4-FFF2-40B4-BE49-F238E27FC236}">
+                <a16:creationId xmlns:a16="http://schemas.microsoft.com/office/drawing/2014/main" id="{911DB458-8857-C467-0831-E3885707B395}"/>
+              </a:ext>
+            </a:extLst>
+          </p:cNvPr>
+          <p:cNvPicPr>
+            <a:picLocks noChangeAspect="1"/>
+          </p:cNvPicPr>
+          <p:nvPr/>
+        </p:nvPicPr>
+        <p:blipFill>
+          <a:blip r:embed="rId3"/>
+          <a:srcRect t="9387" b="16327"/>
+          <a:stretch>
+            <a:fillRect/>
+          </a:stretch>
+        </p:blipFill>
+        <p:spPr>
+          <a:xfrm>
+            <a:off x="1204427" y="1175657"/>
+            <a:ext cx="9451133" cy="4680562"/>
+          </a:xfrm>
+          <a:prstGeom prst="rect">
+            <a:avLst/>
+          </a:prstGeom>
+        </p:spPr>
+      </p:pic>
+    </p:spTree>
+    <p:extLst>
+      <p:ext uri="{BB962C8B-B14F-4D97-AF65-F5344CB8AC3E}">
+        <p14:creationId xmlns:p14="http://schemas.microsoft.com/office/powerpoint/2010/main" val="2850613852"/>
+      </p:ext>
+    </p:extLst>
+  </p:cSld>
+  <p:clrMapOvr>
+    <a:masterClrMapping/>
+  </p:clrMapOvr>
+</p:sld>
+</file>
+
+<file path=ppt/slides/slide7.xml><?xml version="1.0" encoding="utf-8"?>
+<p:sld xmlns:a="http://schemas.openxmlformats.org/drawingml/2006/main" xmlns:r="http://schemas.openxmlformats.org/officeDocument/2006/relationships" xmlns:p="http://schemas.openxmlformats.org/presentationml/2006/main">
   <p:cSld name="Slide 6">
     <p:spTree>
       <p:nvGrpSpPr>
@@ -16717,7 +17227,7 @@
 </p:sld>
 </file>
 
-<file path=ppt/slides/slide7.xml><?xml version="1.0" encoding="utf-8"?>
+<file path=ppt/slides/slide8.xml><?xml version="1.0" encoding="utf-8"?>
 <p:sld xmlns:a="http://schemas.openxmlformats.org/drawingml/2006/main" xmlns:r="http://schemas.openxmlformats.org/officeDocument/2006/relationships" xmlns:p="http://schemas.openxmlformats.org/presentationml/2006/main">
   <p:cSld name="Slide 7">
     <p:spTree>
@@ -17026,7 +17536,7 @@
 </p:sld>
 </file>
 
-<file path=ppt/slides/slide8.xml><?xml version="1.0" encoding="utf-8"?>
+<file path=ppt/slides/slide9.xml><?xml version="1.0" encoding="utf-8"?>
 <p:sld xmlns:a="http://schemas.openxmlformats.org/drawingml/2006/main" xmlns:r="http://schemas.openxmlformats.org/officeDocument/2006/relationships" xmlns:p="http://schemas.openxmlformats.org/presentationml/2006/main">
   <p:cSld name="Slide 8">
     <p:spTree>
@@ -17383,212 +17893,6 @@
               <a:t>La entidad obtenida mediante findById() está en estado managed mientras dura la transacción. Hibernate detecta el cambio de precio y lo guarda cuando la transacción termina, aunque no aparezca una nueva llamada a save().</a:t>
             </a:r>
             <a:endParaRPr lang="en-US" sz="1800" dirty="0"/>
-          </a:p>
-        </p:txBody>
-      </p:sp>
-    </p:spTree>
-  </p:cSld>
-  <p:clrMapOvr>
-    <a:masterClrMapping/>
-  </p:clrMapOvr>
-</p:sld>
-</file>
-
-<file path=ppt/slides/slide9.xml><?xml version="1.0" encoding="utf-8"?>
-<p:sld xmlns:a="http://schemas.openxmlformats.org/drawingml/2006/main" xmlns:r="http://schemas.openxmlformats.org/officeDocument/2006/relationships" xmlns:p="http://schemas.openxmlformats.org/presentationml/2006/main">
-  <p:cSld name="Slide 9">
-    <p:spTree>
-      <p:nvGrpSpPr>
-        <p:cNvPr id="1" name=""/>
-        <p:cNvGrpSpPr/>
-        <p:nvPr/>
-      </p:nvGrpSpPr>
-      <p:grpSpPr>
-        <a:xfrm>
-          <a:off x="0" y="0"/>
-          <a:ext cx="0" cy="0"/>
-          <a:chOff x="0" y="0"/>
-          <a:chExt cx="0" cy="0"/>
-        </a:xfrm>
-      </p:grpSpPr>
-      <p:sp>
-        <p:nvSpPr>
-          <p:cNvPr id="2" name="Shape 0"/>
-          <p:cNvSpPr/>
-          <p:nvPr/>
-        </p:nvSpPr>
-        <p:spPr>
-          <a:xfrm>
-            <a:off x="0" y="0"/>
-            <a:ext cx="12188952" cy="777240"/>
-          </a:xfrm>
-          <a:prstGeom prst="rect">
-            <a:avLst/>
-          </a:prstGeom>
-          <a:solidFill>
-            <a:srgbClr val="7F0000"/>
-          </a:solidFill>
-          <a:ln w="12700">
-            <a:solidFill>
-              <a:srgbClr val="7F0000"/>
-            </a:solidFill>
-            <a:prstDash val="solid"/>
-          </a:ln>
-        </p:spPr>
-        <p:txBody>
-          <a:bodyPr/>
-          <a:lstStyle/>
-          <a:p>
-            <a:endParaRPr lang="es-ES"/>
-          </a:p>
-        </p:txBody>
-      </p:sp>
-      <p:sp>
-        <p:nvSpPr>
-          <p:cNvPr id="3" name="Text 1"/>
-          <p:cNvSpPr/>
-          <p:nvPr/>
-        </p:nvSpPr>
-        <p:spPr>
-          <a:xfrm>
-            <a:off x="365760" y="0"/>
-            <a:ext cx="11457432" cy="777240"/>
-          </a:xfrm>
-          <a:prstGeom prst="rect">
-            <a:avLst/>
-          </a:prstGeom>
-          <a:noFill/>
-          <a:ln/>
-        </p:spPr>
-        <p:txBody>
-          <a:bodyPr wrap="square" rtlCol="0" anchor="ctr"/>
-          <a:lstStyle/>
-          <a:p>
-            <a:pPr marL="0" indent="0">
-              <a:buNone/>
-            </a:pPr>
-            <a:r>
-              <a:rPr lang="en-US" sz="2500" b="1" dirty="0">
-                <a:solidFill>
-                  <a:srgbClr val="FFFFFF"/>
-                </a:solidFill>
-                <a:latin typeface="Arial" pitchFamily="34" charset="0"/>
-                <a:ea typeface="Arial" pitchFamily="34" charset="-122"/>
-                <a:cs typeface="Arial" pitchFamily="34" charset="-120"/>
-              </a:rPr>
-              <a:t>Cuando la transacción termina</a:t>
-            </a:r>
-            <a:endParaRPr lang="en-US" sz="2500" dirty="0"/>
-          </a:p>
-        </p:txBody>
-      </p:sp>
-      <p:sp>
-        <p:nvSpPr>
-          <p:cNvPr id="4" name="Text 2"/>
-          <p:cNvSpPr/>
-          <p:nvPr/>
-        </p:nvSpPr>
-        <p:spPr>
-          <a:xfrm>
-            <a:off x="548640" y="6473952"/>
-            <a:ext cx="11091672" cy="292608"/>
-          </a:xfrm>
-          <a:prstGeom prst="rect">
-            <a:avLst/>
-          </a:prstGeom>
-          <a:noFill/>
-          <a:ln/>
-        </p:spPr>
-        <p:txBody>
-          <a:bodyPr wrap="square" rtlCol="0" anchor="ctr"/>
-          <a:lstStyle/>
-          <a:p>
-            <a:pPr marL="0" indent="0" algn="r">
-              <a:buNone/>
-            </a:pPr>
-            <a:r>
-              <a:rPr lang="en-US" sz="1100" dirty="0">
-                <a:solidFill>
-                  <a:srgbClr val="757575"/>
-                </a:solidFill>
-                <a:latin typeface="Arial" pitchFamily="34" charset="0"/>
-                <a:ea typeface="Arial" pitchFamily="34" charset="-122"/>
-                <a:cs typeface="Arial" pitchFamily="34" charset="-120"/>
-              </a:rPr>
-              <a:t>Acceso a Datos — Tema 1: Hibernate a fondo</a:t>
-            </a:r>
-            <a:endParaRPr lang="en-US" sz="1100" dirty="0"/>
-          </a:p>
-        </p:txBody>
-      </p:sp>
-      <p:sp>
-        <p:nvSpPr>
-          <p:cNvPr id="5" name="Shape 3"/>
-          <p:cNvSpPr/>
-          <p:nvPr/>
-        </p:nvSpPr>
-        <p:spPr>
-          <a:xfrm>
-            <a:off x="548640" y="2880360"/>
-            <a:ext cx="11091672" cy="1463040"/>
-          </a:xfrm>
-          <a:prstGeom prst="roundRect">
-            <a:avLst/>
-          </a:prstGeom>
-          <a:solidFill>
-            <a:srgbClr val="FBE9E7"/>
-          </a:solidFill>
-          <a:ln w="19050">
-            <a:solidFill>
-              <a:srgbClr val="E64A19"/>
-            </a:solidFill>
-            <a:prstDash val="solid"/>
-          </a:ln>
-        </p:spPr>
-        <p:txBody>
-          <a:bodyPr/>
-          <a:lstStyle/>
-          <a:p>
-            <a:endParaRPr lang="es-ES"/>
-          </a:p>
-        </p:txBody>
-      </p:sp>
-      <p:sp>
-        <p:nvSpPr>
-          <p:cNvPr id="6" name="Text 4"/>
-          <p:cNvSpPr/>
-          <p:nvPr/>
-        </p:nvSpPr>
-        <p:spPr>
-          <a:xfrm>
-            <a:off x="822960" y="2971800"/>
-            <a:ext cx="10543032" cy="1280160"/>
-          </a:xfrm>
-          <a:prstGeom prst="rect">
-            <a:avLst/>
-          </a:prstGeom>
-          <a:noFill/>
-          <a:ln/>
-        </p:spPr>
-        <p:txBody>
-          <a:bodyPr wrap="square" rtlCol="0" anchor="ctr"/>
-          <a:lstStyle/>
-          <a:p>
-            <a:pPr marL="0" indent="0">
-              <a:buNone/>
-            </a:pPr>
-            <a:r>
-              <a:rPr lang="en-US" sz="2100" dirty="0">
-                <a:solidFill>
-                  <a:srgbClr val="212121"/>
-                </a:solidFill>
-                <a:latin typeface="Arial" pitchFamily="34" charset="0"/>
-                <a:ea typeface="Arial" pitchFamily="34" charset="-122"/>
-                <a:cs typeface="Arial" pitchFamily="34" charset="-120"/>
-              </a:rPr>
-              <a:t>Cuando la transacción finaliza y Hibernate deja de gestionar ese objeto, pasa a estado detached. Conserva todos sus datos, pero los cambios posteriores ya no se sincronizan automáticamente con la base de datos.</a:t>
-            </a:r>
-            <a:endParaRPr lang="en-US" sz="2100" dirty="0"/>
           </a:p>
         </p:txBody>
       </p:sp>
